--- a/assets/powerpoints/module-n2-inscription/A3-quel-est-votre-nom.pptx
+++ b/assets/powerpoints/module-n2-inscription/A3-quel-est-votre-nom.pptx
@@ -8752,7 +8752,43 @@
                 </a:solidFill>
                 <a:latin typeface="Verdana"/>
               </a:rPr>
-              <a:t>On écrit &lt;b&gt;quel&lt;/b&gt; devant un mot masculin — nom, prénom, courriel, numéro — et &lt;b&gt;quelle&lt;/b&gt; devant un mot féminin — adresse, date, ville, scolarité. À l'oral, il n'y a rien à choisir : c'est un savoir d'écriture, pas d'oreille.</a:t>
+              <a:t>On écrit </a:t>
+            </a:r>
+            <a:r>
+              <a:rPr sz="2000" b="1" i="0">
+                <a:solidFill>
+                  <a:srgbClr val="4B4F52"/>
+                </a:solidFill>
+                <a:latin typeface="Verdana"/>
+              </a:rPr>
+              <a:t>quel</a:t>
+            </a:r>
+            <a:r>
+              <a:rPr sz="2000" b="0" i="0">
+                <a:solidFill>
+                  <a:srgbClr val="4B4F52"/>
+                </a:solidFill>
+                <a:latin typeface="Verdana"/>
+              </a:rPr>
+              <a:t> devant un mot masculin — nom, prénom, courriel, numéro — et </a:t>
+            </a:r>
+            <a:r>
+              <a:rPr sz="2000" b="1" i="0">
+                <a:solidFill>
+                  <a:srgbClr val="4B4F52"/>
+                </a:solidFill>
+                <a:latin typeface="Verdana"/>
+              </a:rPr>
+              <a:t>quelle</a:t>
+            </a:r>
+            <a:r>
+              <a:rPr sz="2000" b="0" i="0">
+                <a:solidFill>
+                  <a:srgbClr val="4B4F52"/>
+                </a:solidFill>
+                <a:latin typeface="Verdana"/>
+              </a:rPr>
+              <a:t> devant un mot féminin — adresse, date, ville, scolarité. À l'oral, il n'y a rien à choisir : c'est un savoir d'écriture, pas d'oreille.</a:t>
             </a:r>
           </a:p>
         </p:txBody>
